--- a/documentation/muinferece-slides.pptx
+++ b/documentation/muinferece-slides.pptx
@@ -10,20 +10,21 @@
     <p:sldId id="260" r:id="rId4"/>
     <p:sldId id="261" r:id="rId5"/>
     <p:sldId id="277" r:id="rId6"/>
-    <p:sldId id="265" r:id="rId7"/>
-    <p:sldId id="278" r:id="rId8"/>
-    <p:sldId id="279" r:id="rId9"/>
-    <p:sldId id="263" r:id="rId10"/>
-    <p:sldId id="266" r:id="rId11"/>
-    <p:sldId id="267" r:id="rId12"/>
-    <p:sldId id="268" r:id="rId13"/>
-    <p:sldId id="269" r:id="rId14"/>
-    <p:sldId id="270" r:id="rId15"/>
-    <p:sldId id="271" r:id="rId16"/>
-    <p:sldId id="272" r:id="rId17"/>
-    <p:sldId id="273" r:id="rId18"/>
-    <p:sldId id="274" r:id="rId19"/>
-    <p:sldId id="275" r:id="rId20"/>
+    <p:sldId id="280" r:id="rId7"/>
+    <p:sldId id="265" r:id="rId8"/>
+    <p:sldId id="278" r:id="rId9"/>
+    <p:sldId id="279" r:id="rId10"/>
+    <p:sldId id="263" r:id="rId11"/>
+    <p:sldId id="266" r:id="rId12"/>
+    <p:sldId id="267" r:id="rId13"/>
+    <p:sldId id="268" r:id="rId14"/>
+    <p:sldId id="269" r:id="rId15"/>
+    <p:sldId id="270" r:id="rId16"/>
+    <p:sldId id="271" r:id="rId17"/>
+    <p:sldId id="272" r:id="rId18"/>
+    <p:sldId id="273" r:id="rId19"/>
+    <p:sldId id="274" r:id="rId20"/>
+    <p:sldId id="275" r:id="rId21"/>
   </p:sldIdLst>
   <p:sldSz cx="9144000" cy="5143500" type="screen16x9"/>
   <p:notesSz cx="6858000" cy="9144000"/>
@@ -320,7 +321,7 @@
           <a:p>
             <a:fld id="{241EB5C9-1307-BA42-ABA2-0BC069CD8E7F}" type="datetimeFigureOut">
               <a:rPr lang="en-US" smtClean="0"/>
-              <a:t>6/29/2025</a:t>
+              <a:t>7/20/2025</a:t>
             </a:fld>
             <a:endParaRPr lang="en-US"/>
           </a:p>
@@ -488,7 +489,7 @@
           <a:p>
             <a:fld id="{241EB5C9-1307-BA42-ABA2-0BC069CD8E7F}" type="datetimeFigureOut">
               <a:rPr lang="en-US" smtClean="0"/>
-              <a:t>6/29/2025</a:t>
+              <a:t>7/20/2025</a:t>
             </a:fld>
             <a:endParaRPr lang="en-US"/>
           </a:p>
@@ -666,7 +667,7 @@
           <a:p>
             <a:fld id="{241EB5C9-1307-BA42-ABA2-0BC069CD8E7F}" type="datetimeFigureOut">
               <a:rPr lang="en-US" smtClean="0"/>
-              <a:t>6/29/2025</a:t>
+              <a:t>7/20/2025</a:t>
             </a:fld>
             <a:endParaRPr lang="en-US"/>
           </a:p>
@@ -834,7 +835,7 @@
           <a:p>
             <a:fld id="{241EB5C9-1307-BA42-ABA2-0BC069CD8E7F}" type="datetimeFigureOut">
               <a:rPr lang="en-US" smtClean="0"/>
-              <a:t>6/29/2025</a:t>
+              <a:t>7/20/2025</a:t>
             </a:fld>
             <a:endParaRPr lang="en-US"/>
           </a:p>
@@ -1079,7 +1080,7 @@
           <a:p>
             <a:fld id="{241EB5C9-1307-BA42-ABA2-0BC069CD8E7F}" type="datetimeFigureOut">
               <a:rPr lang="en-US" smtClean="0"/>
-              <a:t>6/29/2025</a:t>
+              <a:t>7/20/2025</a:t>
             </a:fld>
             <a:endParaRPr lang="en-US"/>
           </a:p>
@@ -1364,7 +1365,7 @@
           <a:p>
             <a:fld id="{241EB5C9-1307-BA42-ABA2-0BC069CD8E7F}" type="datetimeFigureOut">
               <a:rPr lang="en-US" smtClean="0"/>
-              <a:t>6/29/2025</a:t>
+              <a:t>7/20/2025</a:t>
             </a:fld>
             <a:endParaRPr lang="en-US"/>
           </a:p>
@@ -1783,7 +1784,7 @@
           <a:p>
             <a:fld id="{241EB5C9-1307-BA42-ABA2-0BC069CD8E7F}" type="datetimeFigureOut">
               <a:rPr lang="en-US" smtClean="0"/>
-              <a:t>6/29/2025</a:t>
+              <a:t>7/20/2025</a:t>
             </a:fld>
             <a:endParaRPr lang="en-US"/>
           </a:p>
@@ -1900,7 +1901,7 @@
           <a:p>
             <a:fld id="{241EB5C9-1307-BA42-ABA2-0BC069CD8E7F}" type="datetimeFigureOut">
               <a:rPr lang="en-US" smtClean="0"/>
-              <a:t>6/29/2025</a:t>
+              <a:t>7/20/2025</a:t>
             </a:fld>
             <a:endParaRPr lang="en-US"/>
           </a:p>
@@ -1995,7 +1996,7 @@
           <a:p>
             <a:fld id="{241EB5C9-1307-BA42-ABA2-0BC069CD8E7F}" type="datetimeFigureOut">
               <a:rPr lang="en-US" smtClean="0"/>
-              <a:t>6/29/2025</a:t>
+              <a:t>7/20/2025</a:t>
             </a:fld>
             <a:endParaRPr lang="en-US"/>
           </a:p>
@@ -2270,7 +2271,7 @@
           <a:p>
             <a:fld id="{241EB5C9-1307-BA42-ABA2-0BC069CD8E7F}" type="datetimeFigureOut">
               <a:rPr lang="en-US" smtClean="0"/>
-              <a:t>6/29/2025</a:t>
+              <a:t>7/20/2025</a:t>
             </a:fld>
             <a:endParaRPr lang="en-US"/>
           </a:p>
@@ -2522,7 +2523,7 @@
           <a:p>
             <a:fld id="{241EB5C9-1307-BA42-ABA2-0BC069CD8E7F}" type="datetimeFigureOut">
               <a:rPr lang="en-US" smtClean="0"/>
-              <a:t>6/29/2025</a:t>
+              <a:t>7/20/2025</a:t>
             </a:fld>
             <a:endParaRPr lang="en-US"/>
           </a:p>
@@ -2733,7 +2734,7 @@
           <a:p>
             <a:fld id="{241EB5C9-1307-BA42-ABA2-0BC069CD8E7F}" type="datetimeFigureOut">
               <a:rPr lang="en-US" smtClean="0"/>
-              <a:t>6/29/2025</a:t>
+              <a:t>7/20/2025</a:t>
             </a:fld>
             <a:endParaRPr lang="en-US"/>
           </a:p>
@@ -3153,8 +3154,8 @@
           <a:lstStyle/>
           <a:p>
             <a:r>
-              <a:rPr lang="en-US" noProof="0" dirty="0"/>
-              <a:t>SL5 Security Task Force</a:t>
+              <a:rPr lang="en-US" dirty="0"/>
+              <a:t>A Software Supply Chain Initiative for SL5 Security</a:t>
             </a:r>
           </a:p>
         </p:txBody>
@@ -3186,7 +3187,13 @@
       </p:grpSpPr>
       <p:sp>
         <p:nvSpPr>
-          <p:cNvPr id="2" name="Title 1"/>
+          <p:cNvPr id="2" name="Title 1">
+            <a:extLst>
+              <a:ext uri="{FF2B5EF4-FFF2-40B4-BE49-F238E27FC236}">
+                <a16:creationId xmlns:a16="http://schemas.microsoft.com/office/drawing/2014/main" id="{1FD91782-A608-FA06-62AB-812DFB0A6F3E}"/>
+              </a:ext>
+            </a:extLst>
+          </p:cNvPr>
           <p:cNvSpPr>
             <a:spLocks noGrp="1"/>
           </p:cNvSpPr>
@@ -3194,19 +3201,19 @@
             <p:ph type="title"/>
           </p:nvPr>
         </p:nvSpPr>
-        <p:spPr/>
-        <p:txBody>
-          <a:bodyPr>
-            <a:normAutofit/>
-          </a:bodyPr>
-          <a:lstStyle/>
-          <a:p>
-            <a:pPr marL="0" lvl="0" indent="0">
-              <a:buNone/>
-            </a:pPr>
-            <a:r>
-              <a:rPr lang="en-US" noProof="0" dirty="0"/>
-              <a:t>Why musl + BusyBox?</a:t>
+        <p:spPr>
+          <a:xfrm>
+            <a:off x="457200" y="205979"/>
+            <a:ext cx="8229600" cy="857250"/>
+          </a:xfrm>
+        </p:spPr>
+        <p:txBody>
+          <a:bodyPr/>
+          <a:lstStyle/>
+          <a:p>
+            <a:r>
+              <a:rPr lang="en-US" noProof="0" dirty="0"/>
+              <a:t>Why Limine?</a:t>
             </a:r>
           </a:p>
         </p:txBody>
@@ -3221,99 +3228,37 @@
             <p:ph idx="1"/>
           </p:nvPr>
         </p:nvSpPr>
-        <p:spPr/>
-        <p:txBody>
-          <a:bodyPr>
-            <a:normAutofit fontScale="92500" lnSpcReduction="10000"/>
-          </a:bodyPr>
-          <a:lstStyle/>
-          <a:p>
-            <a:r>
-              <a:rPr lang="en-US" b="1" noProof="0" dirty="0"/>
-              <a:t>musl libc (100K LOC)</a:t>
-            </a:r>
-          </a:p>
-          <a:p>
-            <a:pPr lvl="1"/>
-            <a:r>
-              <a:rPr lang="en-US" noProof="0" dirty="0"/>
-              <a:t>10x smaller than </a:t>
-            </a:r>
-            <a:r>
-              <a:rPr lang="en-US" noProof="0" dirty="0" err="1"/>
-              <a:t>glibc</a:t>
-            </a:r>
-            <a:endParaRPr lang="en-US" noProof="0" dirty="0"/>
-          </a:p>
-          <a:p>
-            <a:pPr lvl="1"/>
-            <a:r>
-              <a:rPr lang="en-US" noProof="0" dirty="0"/>
-              <a:t>Static linking friendly</a:t>
-            </a:r>
-          </a:p>
-          <a:p>
-            <a:pPr lvl="1"/>
-            <a:r>
-              <a:rPr lang="en-US" noProof="0" dirty="0"/>
-              <a:t>Clean, modern C implementation</a:t>
-            </a:r>
-          </a:p>
-          <a:p>
-            <a:pPr lvl="1"/>
-            <a:r>
-              <a:rPr lang="en-US" noProof="0" dirty="0"/>
-              <a:t>No legacy baggage</a:t>
-            </a:r>
-          </a:p>
-          <a:p>
-            <a:r>
-              <a:rPr lang="en-US" b="1" noProof="0" dirty="0"/>
-              <a:t>BusyBox (200K LOC)</a:t>
-            </a:r>
-          </a:p>
-          <a:p>
-            <a:pPr lvl="1"/>
-            <a:r>
-              <a:rPr lang="en-US" noProof="0" dirty="0"/>
-              <a:t>300+ Unix utilities in one binary</a:t>
-            </a:r>
-          </a:p>
-          <a:p>
-            <a:pPr lvl="1"/>
-            <a:r>
-              <a:rPr lang="en-US" noProof="0" dirty="0"/>
-              <a:t>Configurable feature set</a:t>
-            </a:r>
-          </a:p>
-          <a:p>
-            <a:pPr lvl="1"/>
-            <a:r>
-              <a:rPr lang="en-US" noProof="0" dirty="0"/>
-              <a:t>1MB static binary</a:t>
-            </a:r>
-          </a:p>
-          <a:p>
-            <a:pPr lvl="1"/>
-            <a:r>
-              <a:rPr lang="en-US" noProof="0" dirty="0"/>
-              <a:t>Replaces </a:t>
-            </a:r>
-            <a:r>
-              <a:rPr lang="en-US" noProof="0" dirty="0" err="1"/>
-              <a:t>coreutils</a:t>
-            </a:r>
-            <a:r>
-              <a:rPr lang="en-US" noProof="0" dirty="0"/>
-              <a:t>, util-</a:t>
-            </a:r>
-            <a:r>
-              <a:rPr lang="en-US" noProof="0" dirty="0" err="1"/>
-              <a:t>linux</a:t>
-            </a:r>
-            <a:r>
-              <a:rPr lang="en-US" noProof="0" dirty="0"/>
-              <a:t>, etc.</a:t>
+        <p:spPr>
+          <a:xfrm>
+            <a:off x="457200" y="1200151"/>
+            <a:ext cx="8229600" cy="3394472"/>
+          </a:xfrm>
+        </p:spPr>
+        <p:txBody>
+          <a:bodyPr/>
+          <a:lstStyle/>
+          <a:p>
+            <a:r>
+              <a:rPr lang="en-US" noProof="0" dirty="0"/>
+              <a:t>Modern UEFI/BIOS support </a:t>
+            </a:r>
+          </a:p>
+          <a:p>
+            <a:r>
+              <a:rPr lang="en-US" noProof="0" dirty="0"/>
+              <a:t>Minimal configuration </a:t>
+            </a:r>
+          </a:p>
+          <a:p>
+            <a:r>
+              <a:rPr lang="en-US" noProof="0" dirty="0"/>
+              <a:t>Fast boot times </a:t>
+            </a:r>
+          </a:p>
+          <a:p>
+            <a:r>
+              <a:rPr lang="en-US" noProof="0" dirty="0"/>
+              <a:t>No unnecessary features</a:t>
             </a:r>
           </a:p>
         </p:txBody>
@@ -3353,20 +3298,19 @@
             <p:ph type="title"/>
           </p:nvPr>
         </p:nvSpPr>
-        <p:spPr>
-          <a:xfrm>
-            <a:off x="457200" y="205979"/>
-            <a:ext cx="8229600" cy="857250"/>
-          </a:xfrm>
-        </p:spPr>
-        <p:txBody>
-          <a:bodyPr/>
-          <a:lstStyle/>
-          <a:p>
-            <a:pPr lvl="0"/>
-            <a:r>
-              <a:rPr lang="en-US" noProof="0" dirty="0"/>
-              <a:t>Why llama2.c?</a:t>
+        <p:spPr/>
+        <p:txBody>
+          <a:bodyPr>
+            <a:normAutofit/>
+          </a:bodyPr>
+          <a:lstStyle/>
+          <a:p>
+            <a:pPr marL="0" lvl="0" indent="0">
+              <a:buNone/>
+            </a:pPr>
+            <a:r>
+              <a:rPr lang="en-US" noProof="0" dirty="0"/>
+              <a:t>Why musl + BusyBox?</a:t>
             </a:r>
           </a:p>
         </p:txBody>
@@ -3381,70 +3325,99 @@
             <p:ph idx="1"/>
           </p:nvPr>
         </p:nvSpPr>
-        <p:spPr>
-          <a:xfrm>
-            <a:off x="457200" y="1200151"/>
-            <a:ext cx="8229600" cy="3394472"/>
-          </a:xfrm>
-        </p:spPr>
+        <p:spPr/>
         <p:txBody>
           <a:bodyPr>
-            <a:normAutofit fontScale="92500"/>
+            <a:normAutofit fontScale="92500" lnSpcReduction="10000"/>
           </a:bodyPr>
           <a:lstStyle/>
           <a:p>
-            <a:pPr lvl="0"/>
-            <a:r>
-              <a:rPr lang="en-US" noProof="0" dirty="0"/>
-              <a:t>Complete inference in 4,000 lines</a:t>
-            </a:r>
-          </a:p>
-          <a:p>
-            <a:r>
-              <a:rPr lang="en-US" noProof="0" dirty="0"/>
-              <a:t>Pure C implementation (and easily portable to Rust with LLMs!)</a:t>
-            </a:r>
-          </a:p>
-          <a:p>
-            <a:pPr lvl="0"/>
-            <a:r>
-              <a:rPr lang="en-US" noProof="0" dirty="0"/>
-              <a:t>Transformer architecture</a:t>
-            </a:r>
-          </a:p>
-          <a:p>
-            <a:pPr lvl="0"/>
-            <a:r>
-              <a:rPr lang="en-US" noProof="0" dirty="0"/>
-              <a:t>BPE tokenizer  </a:t>
-            </a:r>
-          </a:p>
-          <a:p>
-            <a:pPr lvl="0"/>
-            <a:r>
-              <a:rPr lang="en-US" noProof="0" dirty="0"/>
-              <a:t>Temperature sampling</a:t>
-            </a:r>
-          </a:p>
-          <a:p>
-            <a:pPr lvl="0"/>
-            <a:r>
-              <a:rPr lang="en-US" noProof="0" dirty="0"/>
-              <a:t>Top-p sampling</a:t>
-            </a:r>
-          </a:p>
-          <a:p>
-            <a:pPr lvl="0"/>
-            <a:r>
-              <a:rPr lang="en-US" noProof="0" dirty="0"/>
-              <a:t>No dependencies</a:t>
-            </a:r>
-          </a:p>
-          <a:p>
-            <a:pPr lvl="0"/>
-            <a:r>
-              <a:rPr lang="en-US" noProof="0" dirty="0"/>
-              <a:t>Runs models efficiently</a:t>
+            <a:r>
+              <a:rPr lang="en-US" b="1" noProof="0" dirty="0"/>
+              <a:t>musl libc</a:t>
+            </a:r>
+          </a:p>
+          <a:p>
+            <a:pPr lvl="1"/>
+            <a:r>
+              <a:rPr lang="en-US" noProof="0" dirty="0"/>
+              <a:t>10x smaller than </a:t>
+            </a:r>
+            <a:r>
+              <a:rPr lang="en-US" noProof="0" dirty="0" err="1"/>
+              <a:t>glibc</a:t>
+            </a:r>
+            <a:endParaRPr lang="en-US" noProof="0" dirty="0"/>
+          </a:p>
+          <a:p>
+            <a:pPr lvl="1"/>
+            <a:r>
+              <a:rPr lang="en-US" noProof="0" dirty="0"/>
+              <a:t>Static linking friendly</a:t>
+            </a:r>
+          </a:p>
+          <a:p>
+            <a:pPr lvl="1"/>
+            <a:r>
+              <a:rPr lang="en-US" noProof="0" dirty="0"/>
+              <a:t>Clean, modern C implementation</a:t>
+            </a:r>
+          </a:p>
+          <a:p>
+            <a:pPr lvl="1"/>
+            <a:r>
+              <a:rPr lang="en-US" noProof="0" dirty="0"/>
+              <a:t>No legacy baggage</a:t>
+            </a:r>
+          </a:p>
+          <a:p>
+            <a:r>
+              <a:rPr lang="en-US" b="1" noProof="0" dirty="0"/>
+              <a:t>BusyBox</a:t>
+            </a:r>
+          </a:p>
+          <a:p>
+            <a:pPr lvl="1"/>
+            <a:r>
+              <a:rPr lang="en-US" noProof="0" dirty="0"/>
+              <a:t>300+ Unix utilities in one binary</a:t>
+            </a:r>
+          </a:p>
+          <a:p>
+            <a:pPr lvl="1"/>
+            <a:r>
+              <a:rPr lang="en-US" noProof="0" dirty="0"/>
+              <a:t>Configurable feature set</a:t>
+            </a:r>
+          </a:p>
+          <a:p>
+            <a:pPr lvl="1"/>
+            <a:r>
+              <a:rPr lang="en-US" noProof="0" dirty="0"/>
+              <a:t>1MB static binary</a:t>
+            </a:r>
+          </a:p>
+          <a:p>
+            <a:pPr lvl="1"/>
+            <a:r>
+              <a:rPr lang="en-US" noProof="0" dirty="0"/>
+              <a:t>Replaces </a:t>
+            </a:r>
+            <a:r>
+              <a:rPr lang="en-US" noProof="0" dirty="0" err="1"/>
+              <a:t>coreutils</a:t>
+            </a:r>
+            <a:r>
+              <a:rPr lang="en-US" noProof="0" dirty="0"/>
+              <a:t>, util-</a:t>
+            </a:r>
+            <a:r>
+              <a:rPr lang="en-US" noProof="0" dirty="0" err="1"/>
+              <a:t>linux</a:t>
+            </a:r>
+            <a:r>
+              <a:rPr lang="en-US" noProof="0" dirty="0"/>
+              <a:t>, etc.</a:t>
             </a:r>
           </a:p>
         </p:txBody>
@@ -3486,6 +3459,137 @@
         </p:nvSpPr>
         <p:spPr>
           <a:xfrm>
+            <a:off x="457200" y="205979"/>
+            <a:ext cx="8229600" cy="857250"/>
+          </a:xfrm>
+        </p:spPr>
+        <p:txBody>
+          <a:bodyPr/>
+          <a:lstStyle/>
+          <a:p>
+            <a:pPr lvl="0"/>
+            <a:r>
+              <a:rPr lang="en-US" noProof="0" dirty="0"/>
+              <a:t>Why llama2.c?</a:t>
+            </a:r>
+          </a:p>
+        </p:txBody>
+      </p:sp>
+      <p:sp>
+        <p:nvSpPr>
+          <p:cNvPr id="3" name="Content Placeholder 2"/>
+          <p:cNvSpPr>
+            <a:spLocks noGrp="1"/>
+          </p:cNvSpPr>
+          <p:nvPr>
+            <p:ph idx="1"/>
+          </p:nvPr>
+        </p:nvSpPr>
+        <p:spPr>
+          <a:xfrm>
+            <a:off x="457200" y="1200151"/>
+            <a:ext cx="8229600" cy="3394472"/>
+          </a:xfrm>
+        </p:spPr>
+        <p:txBody>
+          <a:bodyPr>
+            <a:normAutofit fontScale="92500"/>
+          </a:bodyPr>
+          <a:lstStyle/>
+          <a:p>
+            <a:pPr lvl="0"/>
+            <a:r>
+              <a:rPr lang="en-US" noProof="0" dirty="0"/>
+              <a:t>Complete inference in 4,000 lines</a:t>
+            </a:r>
+          </a:p>
+          <a:p>
+            <a:r>
+              <a:rPr lang="en-US" noProof="0" dirty="0"/>
+              <a:t>Pure C implementation (and easily portable to Rust with LLMs!)</a:t>
+            </a:r>
+          </a:p>
+          <a:p>
+            <a:pPr lvl="0"/>
+            <a:r>
+              <a:rPr lang="en-US" noProof="0" dirty="0"/>
+              <a:t>Transformer architecture</a:t>
+            </a:r>
+          </a:p>
+          <a:p>
+            <a:pPr lvl="0"/>
+            <a:r>
+              <a:rPr lang="en-US" noProof="0" dirty="0"/>
+              <a:t>BPE tokenizer  </a:t>
+            </a:r>
+          </a:p>
+          <a:p>
+            <a:pPr lvl="0"/>
+            <a:r>
+              <a:rPr lang="en-US" noProof="0" dirty="0"/>
+              <a:t>Temperature sampling</a:t>
+            </a:r>
+          </a:p>
+          <a:p>
+            <a:pPr lvl="0"/>
+            <a:r>
+              <a:rPr lang="en-US" noProof="0" dirty="0"/>
+              <a:t>Top-p sampling</a:t>
+            </a:r>
+          </a:p>
+          <a:p>
+            <a:pPr lvl="0"/>
+            <a:r>
+              <a:rPr lang="en-US" noProof="0" dirty="0"/>
+              <a:t>No dependencies</a:t>
+            </a:r>
+          </a:p>
+          <a:p>
+            <a:pPr lvl="0"/>
+            <a:r>
+              <a:rPr lang="en-US" noProof="0" dirty="0"/>
+              <a:t>Runs models efficiently</a:t>
+            </a:r>
+          </a:p>
+        </p:txBody>
+      </p:sp>
+    </p:spTree>
+  </p:cSld>
+  <p:clrMapOvr>
+    <a:masterClrMapping/>
+  </p:clrMapOvr>
+</p:sld>
+</file>
+
+<file path=ppt/slides/slide13.xml><?xml version="1.0" encoding="utf-8"?>
+<p:sld xmlns:a="http://schemas.openxmlformats.org/drawingml/2006/main" xmlns:r="http://schemas.openxmlformats.org/officeDocument/2006/relationships" xmlns:p="http://schemas.openxmlformats.org/presentationml/2006/main">
+  <p:cSld>
+    <p:spTree>
+      <p:nvGrpSpPr>
+        <p:cNvPr id="1" name=""/>
+        <p:cNvGrpSpPr/>
+        <p:nvPr/>
+      </p:nvGrpSpPr>
+      <p:grpSpPr>
+        <a:xfrm>
+          <a:off x="0" y="0"/>
+          <a:ext cx="0" cy="0"/>
+          <a:chOff x="0" y="0"/>
+          <a:chExt cx="0" cy="0"/>
+        </a:xfrm>
+      </p:grpSpPr>
+      <p:sp>
+        <p:nvSpPr>
+          <p:cNvPr id="2" name="Title 1"/>
+          <p:cNvSpPr>
+            <a:spLocks noGrp="1"/>
+          </p:cNvSpPr>
+          <p:nvPr>
+            <p:ph type="title"/>
+          </p:nvPr>
+        </p:nvSpPr>
+        <p:spPr>
+          <a:xfrm>
             <a:off x="457201" y="204787"/>
             <a:ext cx="3008313" cy="871538"/>
           </a:xfrm>
@@ -3542,14 +3646,14 @@
             <p:ph idx="1"/>
             <p:extLst>
               <p:ext uri="{D42A27DB-BD31-4B8C-83A1-F6EECF244321}">
-                <p14:modId xmlns:p14="http://schemas.microsoft.com/office/powerpoint/2010/main" val="634640374"/>
+                <p14:modId xmlns:p14="http://schemas.microsoft.com/office/powerpoint/2010/main" val="1280273132"/>
               </p:ext>
             </p:extLst>
           </p:nvPr>
         </p:nvGraphicFramePr>
         <p:xfrm>
           <a:off x="3568700" y="203200"/>
-          <a:ext cx="5105400" cy="1988820"/>
+          <a:ext cx="5105400" cy="1691640"/>
         </p:xfrm>
         <a:graphic>
           <a:graphicData uri="http://schemas.openxmlformats.org/drawingml/2006/table">
@@ -3609,45 +3713,6 @@
                 <a:extLst>
                   <a:ext uri="{0D108BD9-81ED-4DB2-BD59-A6C34878D82A}">
                     <a16:rowId xmlns:a16="http://schemas.microsoft.com/office/drawing/2014/main" val="10000"/>
-                  </a:ext>
-                </a:extLst>
-              </a:tr>
-              <a:tr h="0">
-                <a:tc>
-                  <a:txBody>
-                    <a:bodyPr/>
-                    <a:lstStyle/>
-                    <a:p>
-                      <a:pPr marL="0" lvl="0" indent="0">
-                        <a:buNone/>
-                      </a:pPr>
-                      <a:r>
-                        <a:rPr lang="en-US" b="1" noProof="0" dirty="0"/>
-                        <a:t>Total LOC</a:t>
-                      </a:r>
-                    </a:p>
-                  </a:txBody>
-                  <a:tcPr/>
-                </a:tc>
-                <a:tc>
-                  <a:txBody>
-                    <a:bodyPr/>
-                    <a:lstStyle/>
-                    <a:p>
-                      <a:pPr marL="0" lvl="0" indent="0">
-                        <a:buNone/>
-                      </a:pPr>
-                      <a:r>
-                        <a:rPr lang="en-US" noProof="0" dirty="0"/>
-                        <a:t>~27M</a:t>
-                      </a:r>
-                    </a:p>
-                  </a:txBody>
-                  <a:tcPr/>
-                </a:tc>
-                <a:extLst>
-                  <a:ext uri="{0D108BD9-81ED-4DB2-BD59-A6C34878D82A}">
-                    <a16:rowId xmlns:a16="http://schemas.microsoft.com/office/drawing/2014/main" val="10001"/>
                   </a:ext>
                 </a:extLst>
               </a:tr>
@@ -3819,111 +3884,6 @@
 </p:sld>
 </file>
 
-<file path=ppt/slides/slide13.xml><?xml version="1.0" encoding="utf-8"?>
-<p:sld xmlns:a="http://schemas.openxmlformats.org/drawingml/2006/main" xmlns:r="http://schemas.openxmlformats.org/officeDocument/2006/relationships" xmlns:p="http://schemas.openxmlformats.org/presentationml/2006/main">
-  <p:cSld>
-    <p:spTree>
-      <p:nvGrpSpPr>
-        <p:cNvPr id="1" name=""/>
-        <p:cNvGrpSpPr/>
-        <p:nvPr/>
-      </p:nvGrpSpPr>
-      <p:grpSpPr>
-        <a:xfrm>
-          <a:off x="0" y="0"/>
-          <a:ext cx="0" cy="0"/>
-          <a:chOff x="0" y="0"/>
-          <a:chExt cx="0" cy="0"/>
-        </a:xfrm>
-      </p:grpSpPr>
-      <p:sp>
-        <p:nvSpPr>
-          <p:cNvPr id="2" name="Title 1">
-            <a:extLst>
-              <a:ext uri="{FF2B5EF4-FFF2-40B4-BE49-F238E27FC236}">
-                <a16:creationId xmlns:a16="http://schemas.microsoft.com/office/drawing/2014/main" id="{931C83FC-7EB2-DC30-5E9A-DA98C7B83168}"/>
-              </a:ext>
-            </a:extLst>
-          </p:cNvPr>
-          <p:cNvSpPr>
-            <a:spLocks noGrp="1"/>
-          </p:cNvSpPr>
-          <p:nvPr>
-            <p:ph type="title"/>
-          </p:nvPr>
-        </p:nvSpPr>
-        <p:spPr/>
-        <p:txBody>
-          <a:bodyPr>
-            <a:normAutofit/>
-          </a:bodyPr>
-          <a:lstStyle/>
-          <a:p>
-            <a:r>
-              <a:rPr lang="en-US" b="1" noProof="0" dirty="0"/>
-              <a:t>Reduction Ratios</a:t>
-            </a:r>
-            <a:endParaRPr lang="en-US" noProof="0" dirty="0"/>
-          </a:p>
-        </p:txBody>
-      </p:sp>
-      <p:sp>
-        <p:nvSpPr>
-          <p:cNvPr id="3" name="Content Placeholder 2"/>
-          <p:cNvSpPr>
-            <a:spLocks noGrp="1"/>
-          </p:cNvSpPr>
-          <p:nvPr>
-            <p:ph idx="1"/>
-          </p:nvPr>
-        </p:nvSpPr>
-        <p:spPr/>
-        <p:txBody>
-          <a:bodyPr/>
-          <a:lstStyle/>
-          <a:p>
-            <a:pPr lvl="0"/>
-            <a:r>
-              <a:rPr lang="en-US" b="1" noProof="0" dirty="0"/>
-              <a:t>Order of magnitude</a:t>
-            </a:r>
-            <a:r>
-              <a:rPr lang="en-US" noProof="0" dirty="0"/>
-              <a:t> smaller than typical Linux distro</a:t>
-            </a:r>
-          </a:p>
-          <a:p>
-            <a:pPr lvl="0"/>
-            <a:r>
-              <a:rPr lang="en-US" b="1" noProof="0" dirty="0"/>
-              <a:t>Order of magnitude</a:t>
-            </a:r>
-            <a:r>
-              <a:rPr lang="en-US" noProof="0" dirty="0"/>
-              <a:t> fewer dependencies</a:t>
-            </a:r>
-          </a:p>
-          <a:p>
-            <a:pPr lvl="0"/>
-            <a:r>
-              <a:rPr lang="en-US" b="1" noProof="0" dirty="0"/>
-              <a:t>99%</a:t>
-            </a:r>
-            <a:r>
-              <a:rPr lang="en-US" noProof="0" dirty="0"/>
-              <a:t> less attack surface</a:t>
-            </a:r>
-          </a:p>
-        </p:txBody>
-      </p:sp>
-    </p:spTree>
-  </p:cSld>
-  <p:clrMapOvr>
-    <a:masterClrMapping/>
-  </p:clrMapOvr>
-</p:sld>
-</file>
-
 <file path=ppt/slides/slide14.xml><?xml version="1.0" encoding="utf-8"?>
 <p:sld xmlns:a="http://schemas.openxmlformats.org/drawingml/2006/main" xmlns:r="http://schemas.openxmlformats.org/officeDocument/2006/relationships" xmlns:p="http://schemas.openxmlformats.org/presentationml/2006/main">
   <p:cSld>
@@ -3943,7 +3903,13 @@
       </p:grpSpPr>
       <p:sp>
         <p:nvSpPr>
-          <p:cNvPr id="2" name="Title 1"/>
+          <p:cNvPr id="2" name="Title 1">
+            <a:extLst>
+              <a:ext uri="{FF2B5EF4-FFF2-40B4-BE49-F238E27FC236}">
+                <a16:creationId xmlns:a16="http://schemas.microsoft.com/office/drawing/2014/main" id="{931C83FC-7EB2-DC30-5E9A-DA98C7B83168}"/>
+              </a:ext>
+            </a:extLst>
+          </p:cNvPr>
           <p:cNvSpPr>
             <a:spLocks noGrp="1"/>
           </p:cNvSpPr>
@@ -3953,18 +3919,16 @@
         </p:nvSpPr>
         <p:spPr/>
         <p:txBody>
-          <a:bodyPr/>
-          <a:lstStyle/>
-          <a:p>
-            <a:pPr lvl="0">
-              <a:spcBef>
-                <a:spcPts val="3000"/>
-              </a:spcBef>
-            </a:pPr>
+          <a:bodyPr>
+            <a:normAutofit/>
+          </a:bodyPr>
+          <a:lstStyle/>
+          <a:p>
             <a:r>
               <a:rPr lang="en-US" b="1" noProof="0" dirty="0"/>
-              <a:t>How Much Smaller Can We Go?</a:t>
-            </a:r>
+              <a:t>Reduction Ratios</a:t>
+            </a:r>
+            <a:endParaRPr lang="en-US" noProof="0" dirty="0"/>
           </a:p>
         </p:txBody>
       </p:sp>
@@ -3980,89 +3944,39 @@
         </p:nvSpPr>
         <p:spPr/>
         <p:txBody>
-          <a:bodyPr>
-            <a:normAutofit fontScale="85000" lnSpcReduction="20000"/>
-          </a:bodyPr>
-          <a:lstStyle/>
-          <a:p>
+          <a:bodyPr/>
+          <a:lstStyle/>
+          <a:p>
+            <a:pPr lvl="0"/>
             <a:r>
               <a:rPr lang="en-US" b="1" noProof="0" dirty="0"/>
-              <a:t>Phase 1: </a:t>
-            </a:r>
-          </a:p>
-          <a:p>
-            <a:pPr lvl="1"/>
+              <a:t>Order of magnitude</a:t>
+            </a:r>
+            <a:r>
+              <a:rPr lang="en-US" noProof="0" dirty="0"/>
+              <a:t> smaller than typical ML stack</a:t>
+            </a:r>
+          </a:p>
+          <a:p>
+            <a:pPr lvl="0"/>
             <a:r>
               <a:rPr lang="en-US" b="1" noProof="0" dirty="0"/>
-              <a:t>Kernel Diet (Target: 500K LOC)</a:t>
-            </a:r>
-          </a:p>
-          <a:p>
-            <a:pPr lvl="2"/>
-            <a:r>
-              <a:rPr lang="en-US" noProof="0" dirty="0"/>
-              <a:t>Custom minimal kernel config</a:t>
-            </a:r>
-          </a:p>
-          <a:p>
-            <a:pPr lvl="2"/>
-            <a:r>
-              <a:rPr lang="en-US" noProof="0" dirty="0"/>
-              <a:t>Remove more subsystems</a:t>
-            </a:r>
-          </a:p>
-          <a:p>
-            <a:pPr lvl="2"/>
-            <a:r>
-              <a:rPr lang="en-US" noProof="0" dirty="0"/>
-              <a:t>Compile-time optimization</a:t>
-            </a:r>
-          </a:p>
-          <a:p>
+              <a:t>Order of magnitude</a:t>
+            </a:r>
+            <a:r>
+              <a:rPr lang="en-US" noProof="0" dirty="0"/>
+              <a:t> fewer dependencies</a:t>
+            </a:r>
+          </a:p>
+          <a:p>
+            <a:pPr lvl="0"/>
             <a:r>
               <a:rPr lang="en-US" b="1" noProof="0" dirty="0"/>
-              <a:t>Phase 2:</a:t>
-            </a:r>
-          </a:p>
-          <a:p>
-            <a:pPr lvl="1"/>
-            <a:r>
-              <a:rPr lang="en-US" noProof="0" dirty="0"/>
-              <a:t>Formal verification (small enough, see seL4)</a:t>
-            </a:r>
-          </a:p>
-          <a:p>
-            <a:r>
-              <a:rPr lang="en-US" b="1" noProof="0" dirty="0"/>
-              <a:t>Phase 3: </a:t>
-            </a:r>
-          </a:p>
-          <a:p>
-            <a:pPr lvl="1"/>
-            <a:r>
-              <a:rPr lang="en-US" b="1" noProof="0" dirty="0"/>
-              <a:t>Bare Metal (Target: 10K LOC)</a:t>
-            </a:r>
-          </a:p>
-          <a:p>
-            <a:pPr lvl="1"/>
-            <a:r>
-              <a:rPr lang="en-US" noProof="0" dirty="0"/>
-              <a:t>No OS, just bootloader + inference</a:t>
-            </a:r>
-          </a:p>
-          <a:p>
-            <a:pPr lvl="1"/>
-            <a:r>
-              <a:rPr lang="en-US" noProof="0" dirty="0"/>
-              <a:t>Custom memory management</a:t>
-            </a:r>
-          </a:p>
-          <a:p>
-            <a:pPr lvl="1"/>
-            <a:r>
-              <a:rPr lang="en-US" noProof="0" dirty="0"/>
-              <a:t>Direct hardware control</a:t>
+              <a:t>99%</a:t>
+            </a:r>
+            <a:r>
+              <a:rPr lang="en-US" noProof="0" dirty="0"/>
+              <a:t> less attack surface</a:t>
             </a:r>
           </a:p>
         </p:txBody>
@@ -4114,7 +4028,7 @@
             </a:pPr>
             <a:r>
               <a:rPr lang="en-US" b="1" noProof="0" dirty="0"/>
-              <a:t>But there is also Scaling Up</a:t>
+              <a:t>How Much Smaller Can We Go?</a:t>
             </a:r>
           </a:p>
         </p:txBody>
@@ -4136,48 +4050,51 @@
           </a:bodyPr>
           <a:lstStyle/>
           <a:p>
-            <a:pPr marL="0" lvl="0" indent="0">
-              <a:buNone/>
-            </a:pPr>
             <a:r>
               <a:rPr lang="en-US" b="1" noProof="0" dirty="0"/>
-              <a:t>llama.cpp Integration</a:t>
-            </a:r>
-            <a:r>
-              <a:rPr lang="en-US" noProof="0" dirty="0"/>
-              <a:t> </a:t>
-            </a:r>
-          </a:p>
-          <a:p>
-            <a:r>
-              <a:rPr lang="en-US" noProof="0" dirty="0"/>
-              <a:t>4-bit quantization support</a:t>
-            </a:r>
-          </a:p>
-          <a:p>
-            <a:r>
-              <a:rPr lang="en-US" noProof="0" dirty="0"/>
-              <a:t>GPU acceleration (Vulkan)</a:t>
-            </a:r>
-          </a:p>
-          <a:p>
-            <a:r>
-              <a:rPr lang="en-US" noProof="0" dirty="0"/>
-              <a:t> ~50K additional LOC</a:t>
-            </a:r>
-          </a:p>
-          <a:p>
-            <a:r>
-              <a:rPr lang="en-US" noProof="0" dirty="0"/>
-              <a:t>10-100x performance gain</a:t>
+              <a:t>Phase 1: </a:t>
+            </a:r>
+          </a:p>
+          <a:p>
+            <a:pPr lvl="1"/>
+            <a:r>
+              <a:rPr lang="en-US" noProof="0" dirty="0"/>
+              <a:t>Custom minimal kernel config</a:t>
+            </a:r>
+          </a:p>
+          <a:p>
+            <a:pPr lvl="1"/>
+            <a:r>
+              <a:rPr lang="en-US" noProof="0" dirty="0"/>
+              <a:t>Remove more subsystems</a:t>
+            </a:r>
+            <a:endParaRPr lang="en-US" dirty="0"/>
+          </a:p>
+          <a:p>
+            <a:r>
+              <a:rPr lang="en-US" noProof="0" dirty="0"/>
+              <a:t>[…]</a:t>
             </a:r>
           </a:p>
           <a:p>
             <a:r>
               <a:rPr lang="en-US" b="1" noProof="0" dirty="0"/>
-              <a:t>GPU Stack</a:t>
-            </a:r>
-            <a:endParaRPr lang="en-US" noProof="0" dirty="0"/>
+              <a:t>Phase ?: </a:t>
+            </a:r>
+          </a:p>
+          <a:p>
+            <a:pPr lvl="1"/>
+            <a:r>
+              <a:rPr lang="en-US" noProof="0" dirty="0"/>
+              <a:t>No OS, just bootloader + inference</a:t>
+            </a:r>
+          </a:p>
+          <a:p>
+            <a:pPr lvl="1"/>
+            <a:r>
+              <a:rPr lang="en-US" noProof="0" dirty="0"/>
+              <a:t>Direct hardware control</a:t>
+            </a:r>
           </a:p>
         </p:txBody>
       </p:sp>
@@ -4228,7 +4145,7 @@
             </a:pPr>
             <a:r>
               <a:rPr lang="en-US" b="1" noProof="0" dirty="0"/>
-              <a:t>Security Through Minimalism</a:t>
+              <a:t>But there is also Scaling Up</a:t>
             </a:r>
           </a:p>
         </p:txBody>
@@ -4246,7 +4163,7 @@
         <p:spPr/>
         <p:txBody>
           <a:bodyPr>
-            <a:normAutofit fontScale="85000" lnSpcReduction="20000"/>
+            <a:normAutofit/>
           </a:bodyPr>
           <a:lstStyle/>
           <a:p>
@@ -4255,65 +4172,43 @@
             </a:pPr>
             <a:r>
               <a:rPr lang="en-US" b="1" noProof="0" dirty="0"/>
-              <a:t>Attack Surface Reduction</a:t>
-            </a:r>
-          </a:p>
-          <a:p>
-            <a:r>
-              <a:rPr lang="en-US" noProof="0" dirty="0"/>
-              <a:t>99% less code = 99% fewer bugs</a:t>
-            </a:r>
-          </a:p>
-          <a:p>
-            <a:r>
-              <a:rPr lang="en-US" noProof="0" dirty="0"/>
-              <a:t>No network stack = no remote exploits (There is plenty of alternative IO options)</a:t>
-            </a:r>
-          </a:p>
-          <a:p>
-            <a:r>
-              <a:rPr lang="en-US" noProof="0" dirty="0"/>
-              <a:t>No filesystem = no persistence</a:t>
-            </a:r>
-          </a:p>
-          <a:p>
-            <a:r>
-              <a:rPr lang="en-US" noProof="0" dirty="0"/>
-              <a:t>Read-only system = immutable</a:t>
-            </a:r>
-          </a:p>
-          <a:p>
-            <a:pPr marL="0" lvl="0" indent="0">
-              <a:buNone/>
-            </a:pPr>
+              <a:t>llama.cpp Integration</a:t>
+            </a:r>
+            <a:r>
+              <a:rPr lang="en-US" noProof="0" dirty="0"/>
+              <a:t> </a:t>
+            </a:r>
+          </a:p>
+          <a:p>
+            <a:r>
+              <a:rPr lang="en-US" noProof="0" dirty="0"/>
+              <a:t>4-bit quantization support</a:t>
+            </a:r>
+          </a:p>
+          <a:p>
+            <a:r>
+              <a:rPr lang="en-US" noProof="0" dirty="0"/>
+              <a:t>GPU acceleration</a:t>
+            </a:r>
+          </a:p>
+          <a:p>
+            <a:r>
+              <a:rPr lang="en-US" noProof="0" dirty="0"/>
+              <a:t> ~50K additional LOC</a:t>
+            </a:r>
+          </a:p>
+          <a:p>
+            <a:r>
+              <a:rPr lang="en-US" noProof="0" dirty="0"/>
+              <a:t>10-100x performance gain</a:t>
+            </a:r>
+          </a:p>
+          <a:p>
             <a:r>
               <a:rPr lang="en-US" b="1" noProof="0" dirty="0"/>
-              <a:t>Security Features Possible</a:t>
-            </a:r>
-          </a:p>
-          <a:p>
-            <a:r>
-              <a:rPr lang="en-US" noProof="0" dirty="0"/>
-              <a:t>Measured boot with TPM</a:t>
-            </a:r>
-          </a:p>
-          <a:p>
-            <a:r>
-              <a:rPr lang="en-US" noProof="0" dirty="0"/>
-              <a:t>Memory encryption</a:t>
-            </a:r>
-          </a:p>
-          <a:p>
-            <a:r>
-              <a:rPr lang="en-US" noProof="0" dirty="0"/>
-              <a:t>Secure enclave execution</a:t>
-            </a:r>
-          </a:p>
-          <a:p>
-            <a:r>
-              <a:rPr lang="en-US" noProof="0" dirty="0"/>
-              <a:t>Formal verification (small enough, see seL4)</a:t>
-            </a:r>
+              <a:t>GPU Stack</a:t>
+            </a:r>
+            <a:endParaRPr lang="en-US" noProof="0" dirty="0"/>
           </a:p>
         </p:txBody>
       </p:sp>
@@ -4364,7 +4259,7 @@
             </a:pPr>
             <a:r>
               <a:rPr lang="en-US" b="1" noProof="0" dirty="0"/>
-              <a:t>Where Minimal Inference Matters</a:t>
+              <a:t>Security Through Minimalism</a:t>
             </a:r>
           </a:p>
         </p:txBody>
@@ -4381,30 +4276,41 @@
         </p:nvSpPr>
         <p:spPr/>
         <p:txBody>
-          <a:bodyPr/>
-          <a:lstStyle/>
-          <a:p>
-            <a:r>
-              <a:rPr lang="en-US" noProof="0" dirty="0"/>
-              <a:t>Air-gapped systems</a:t>
-            </a:r>
-          </a:p>
-          <a:p>
-            <a:r>
-              <a:rPr lang="en-US" noProof="0" dirty="0"/>
-              <a:t>High-security facilities</a:t>
-            </a:r>
-          </a:p>
-          <a:p>
-            <a:r>
-              <a:rPr lang="en-US" noProof="0" dirty="0"/>
-              <a:t>Compliance-heavy industries</a:t>
-            </a:r>
-          </a:p>
-          <a:p>
-            <a:r>
-              <a:rPr lang="en-US" noProof="0" dirty="0"/>
-              <a:t>Research sandboxes</a:t>
+          <a:bodyPr>
+            <a:normAutofit/>
+          </a:bodyPr>
+          <a:lstStyle/>
+          <a:p>
+            <a:pPr marL="0" lvl="0" indent="0">
+              <a:buNone/>
+            </a:pPr>
+            <a:r>
+              <a:rPr lang="en-US" b="1" noProof="0" dirty="0"/>
+              <a:t>Attack Surface Reduction</a:t>
+            </a:r>
+          </a:p>
+          <a:p>
+            <a:r>
+              <a:rPr lang="en-US" noProof="0" dirty="0"/>
+              <a:t>99% less code = 99% fewer bugs</a:t>
+            </a:r>
+          </a:p>
+          <a:p>
+            <a:r>
+              <a:rPr lang="en-US" noProof="0" dirty="0"/>
+              <a:t>No network stack = no remote exploits (There is plenty of alternative IO) options)</a:t>
+            </a:r>
+          </a:p>
+          <a:p>
+            <a:r>
+              <a:rPr lang="en-US" noProof="0" dirty="0"/>
+              <a:t>No filesystem = no persistence</a:t>
+            </a:r>
+          </a:p>
+          <a:p>
+            <a:r>
+              <a:rPr lang="en-US" noProof="0" dirty="0"/>
+              <a:t>Read-only system = immutable</a:t>
             </a:r>
           </a:p>
         </p:txBody>
@@ -4456,7 +4362,7 @@
             </a:pPr>
             <a:r>
               <a:rPr lang="en-US" b="1" noProof="0" dirty="0"/>
-              <a:t>What This Could Prove</a:t>
+              <a:t>Where Minimal Inference Matters</a:t>
             </a:r>
           </a:p>
         </p:txBody>
@@ -4473,77 +4379,24 @@
         </p:nvSpPr>
         <p:spPr/>
         <p:txBody>
-          <a:bodyPr>
-            <a:normAutofit lnSpcReduction="10000"/>
-          </a:bodyPr>
-          <a:lstStyle/>
-          <a:p>
-            <a:pPr marL="342900" lvl="0" indent="-342900">
-              <a:buAutoNum type="arabicPeriod"/>
-            </a:pPr>
-            <a:r>
-              <a:rPr lang="en-US" b="1" noProof="0" dirty="0"/>
-              <a:t>Frontier labs don’t require millions of LOC</a:t>
-            </a:r>
-          </a:p>
-          <a:p>
-            <a:pPr lvl="1"/>
-            <a:r>
-              <a:rPr lang="en-US" noProof="0" dirty="0"/>
-              <a:t>Core inference is surprisingly simple</a:t>
-            </a:r>
-          </a:p>
-          <a:p>
-            <a:pPr lvl="1"/>
-            <a:r>
-              <a:rPr lang="en-US" noProof="0" dirty="0"/>
-              <a:t>Complexity is in the ecosystem</a:t>
-            </a:r>
-          </a:p>
-          <a:p>
-            <a:pPr marL="342900" lvl="0" indent="-342900">
-              <a:buAutoNum type="arabicPeriod"/>
-            </a:pPr>
-            <a:r>
-              <a:rPr lang="en-US" b="1" noProof="0" dirty="0"/>
-              <a:t>Security through simplicity is achievable</a:t>
-            </a:r>
-          </a:p>
-          <a:p>
-            <a:pPr lvl="1"/>
-            <a:r>
-              <a:rPr lang="en-US" noProof="0" dirty="0"/>
-              <a:t>Small enough to audit</a:t>
-            </a:r>
-          </a:p>
-          <a:p>
-            <a:pPr lvl="1"/>
-            <a:r>
-              <a:rPr lang="en-US" noProof="0" dirty="0"/>
-              <a:t>Small enough to formally verify</a:t>
-            </a:r>
-          </a:p>
-          <a:p>
-            <a:pPr marL="342900" lvl="0" indent="-342900">
-              <a:buAutoNum type="arabicPeriod"/>
-            </a:pPr>
-            <a:r>
-              <a:rPr lang="en-US" b="1" noProof="0" dirty="0"/>
-              <a:t>Edge ML is practical today</a:t>
-            </a:r>
-          </a:p>
-          <a:p>
-            <a:pPr lvl="1"/>
-            <a:r>
-              <a:rPr lang="en-US" noProof="0" dirty="0"/>
-              <a:t>Runs on minimal hardware</a:t>
-            </a:r>
-          </a:p>
-          <a:p>
-            <a:pPr lvl="1"/>
-            <a:r>
-              <a:rPr lang="en-US" noProof="0" dirty="0"/>
-              <a:t>No cloud dependency</a:t>
+          <a:bodyPr/>
+          <a:lstStyle/>
+          <a:p>
+            <a:r>
+              <a:rPr lang="en-US" noProof="0" dirty="0"/>
+              <a:t>Air-gapped systems</a:t>
+            </a:r>
+          </a:p>
+          <a:p>
+            <a:r>
+              <a:rPr lang="en-US" noProof="0" dirty="0"/>
+              <a:t>High-security facilities</a:t>
+            </a:r>
+          </a:p>
+          <a:p>
+            <a:r>
+              <a:rPr lang="en-US" noProof="0" dirty="0"/>
+              <a:t>Research sandboxes</a:t>
             </a:r>
           </a:p>
         </p:txBody>
@@ -4595,7 +4448,7 @@
             </a:pPr>
             <a:r>
               <a:rPr lang="en-US" b="1" noProof="0" dirty="0"/>
-              <a:t>Research Directions</a:t>
+              <a:t>What This Could Prove</a:t>
             </a:r>
           </a:p>
         </p:txBody>
@@ -4613,75 +4466,59 @@
         <p:spPr/>
         <p:txBody>
           <a:bodyPr>
-            <a:normAutofit lnSpcReduction="10000"/>
+            <a:normAutofit/>
           </a:bodyPr>
           <a:lstStyle/>
           <a:p>
+            <a:pPr marL="342900" lvl="0" indent="-342900">
+              <a:buAutoNum type="arabicPeriod"/>
+            </a:pPr>
             <a:r>
               <a:rPr lang="en-US" b="1" noProof="0" dirty="0"/>
-              <a:t>Immediate:</a:t>
-            </a:r>
-            <a:r>
-              <a:rPr lang="en-US" noProof="0" dirty="0"/>
-              <a:t> </a:t>
+              <a:t>Frontier labs don’t require millions of LOC</a:t>
             </a:r>
           </a:p>
           <a:p>
             <a:pPr lvl="1"/>
             <a:r>
               <a:rPr lang="en-US" noProof="0" dirty="0"/>
-              <a:t>Add llama.cpp backend </a:t>
+              <a:t>Core inference is surprisingly simple</a:t>
             </a:r>
           </a:p>
           <a:p>
             <a:pPr lvl="1"/>
             <a:r>
               <a:rPr lang="en-US" noProof="0" dirty="0"/>
-              <a:t>Implement secure boot</a:t>
-            </a:r>
-          </a:p>
-          <a:p>
+              <a:t>Complexity is in the ecosystem</a:t>
+            </a:r>
+          </a:p>
+          <a:p>
+            <a:pPr marL="342900" lvl="0" indent="-342900">
+              <a:buAutoNum type="arabicPeriod"/>
+            </a:pPr>
             <a:r>
               <a:rPr lang="en-US" b="1" noProof="0" dirty="0"/>
-              <a:t>Medium-term:</a:t>
+              <a:t>Security through simplicity is achievable</a:t>
             </a:r>
           </a:p>
           <a:p>
             <a:pPr lvl="1"/>
             <a:r>
-              <a:rPr lang="en-US" noProof="0" dirty="0" err="1"/>
-              <a:t>Unikernel</a:t>
-            </a:r>
-            <a:r>
-              <a:rPr lang="en-US" noProof="0" dirty="0"/>
-              <a:t> design</a:t>
-            </a:r>
-          </a:p>
-          <a:p>
-            <a:pPr lvl="1"/>
-            <a:r>
-              <a:rPr lang="en-US" noProof="0" dirty="0"/>
-              <a:t>Deliberate Hardware stack</a:t>
-            </a:r>
-          </a:p>
-          <a:p>
-            <a:pPr lvl="1"/>
-            <a:r>
-              <a:rPr lang="en-US" noProof="0" dirty="0"/>
-              <a:t>Formal verification</a:t>
-            </a:r>
-          </a:p>
-          <a:p>
-            <a:r>
-              <a:rPr lang="en-US" b="1" noProof="0" dirty="0"/>
-              <a:t>Long-term:</a:t>
-            </a:r>
-          </a:p>
-          <a:p>
-            <a:pPr lvl="1"/>
-            <a:r>
-              <a:rPr lang="en-US" noProof="0" dirty="0"/>
-              <a:t>???</a:t>
+              <a:rPr lang="en-US" noProof="0" dirty="0"/>
+              <a:t>Small enough to audit</a:t>
+            </a:r>
+          </a:p>
+          <a:p>
+            <a:pPr lvl="0">
+              <a:buAutoNum type="arabicPeriod"/>
+            </a:pPr>
+            <a:r>
+              <a:rPr lang="en-US" b="1" dirty="0">
+                <a:highlight>
+                  <a:srgbClr val="FFFF00"/>
+                </a:highlight>
+              </a:rPr>
+              <a:t>But there is also Scaling Up</a:t>
             </a:r>
           </a:p>
         </p:txBody>
@@ -4764,13 +4601,127 @@
           <a:p>
             <a:r>
               <a:rPr lang="en-US" noProof="0" dirty="0"/>
-              <a:t>How does it look like for inference?</a:t>
-            </a:r>
-          </a:p>
-          <a:p>
-            <a:r>
-              <a:rPr lang="en-US" noProof="0" dirty="0"/>
-              <a:t>How does it look like for training?</a:t>
+              <a:t>Do we need to sacrifice functionality?</a:t>
+            </a:r>
+          </a:p>
+        </p:txBody>
+      </p:sp>
+    </p:spTree>
+  </p:cSld>
+  <p:clrMapOvr>
+    <a:masterClrMapping/>
+  </p:clrMapOvr>
+</p:sld>
+</file>
+
+<file path=ppt/slides/slide20.xml><?xml version="1.0" encoding="utf-8"?>
+<p:sld xmlns:a="http://schemas.openxmlformats.org/drawingml/2006/main" xmlns:r="http://schemas.openxmlformats.org/officeDocument/2006/relationships" xmlns:p="http://schemas.openxmlformats.org/presentationml/2006/main">
+  <p:cSld>
+    <p:spTree>
+      <p:nvGrpSpPr>
+        <p:cNvPr id="1" name=""/>
+        <p:cNvGrpSpPr/>
+        <p:nvPr/>
+      </p:nvGrpSpPr>
+      <p:grpSpPr>
+        <a:xfrm>
+          <a:off x="0" y="0"/>
+          <a:ext cx="0" cy="0"/>
+          <a:chOff x="0" y="0"/>
+          <a:chExt cx="0" cy="0"/>
+        </a:xfrm>
+      </p:grpSpPr>
+      <p:sp>
+        <p:nvSpPr>
+          <p:cNvPr id="2" name="Title 1"/>
+          <p:cNvSpPr>
+            <a:spLocks noGrp="1"/>
+          </p:cNvSpPr>
+          <p:nvPr>
+            <p:ph type="title"/>
+          </p:nvPr>
+        </p:nvSpPr>
+        <p:spPr/>
+        <p:txBody>
+          <a:bodyPr/>
+          <a:lstStyle/>
+          <a:p>
+            <a:pPr lvl="0">
+              <a:spcBef>
+                <a:spcPts val="3000"/>
+              </a:spcBef>
+            </a:pPr>
+            <a:r>
+              <a:rPr lang="en-US" b="1" noProof="0" dirty="0"/>
+              <a:t>Research Directions</a:t>
+            </a:r>
+          </a:p>
+        </p:txBody>
+      </p:sp>
+      <p:sp>
+        <p:nvSpPr>
+          <p:cNvPr id="3" name="Content Placeholder 2"/>
+          <p:cNvSpPr>
+            <a:spLocks noGrp="1"/>
+          </p:cNvSpPr>
+          <p:nvPr>
+            <p:ph idx="1"/>
+          </p:nvPr>
+        </p:nvSpPr>
+        <p:spPr/>
+        <p:txBody>
+          <a:bodyPr>
+            <a:normAutofit/>
+          </a:bodyPr>
+          <a:lstStyle/>
+          <a:p>
+            <a:r>
+              <a:rPr lang="en-US" b="1" noProof="0" dirty="0"/>
+              <a:t>Immediate:</a:t>
+            </a:r>
+            <a:r>
+              <a:rPr lang="en-US" noProof="0" dirty="0"/>
+              <a:t> </a:t>
+            </a:r>
+          </a:p>
+          <a:p>
+            <a:pPr lvl="1"/>
+            <a:r>
+              <a:rPr lang="en-US" noProof="0" dirty="0"/>
+              <a:t>Add llama.cpp backend </a:t>
+            </a:r>
+          </a:p>
+          <a:p>
+            <a:pPr lvl="1"/>
+            <a:r>
+              <a:rPr lang="en-US" noProof="0" dirty="0"/>
+              <a:t>Implement secure boot</a:t>
+            </a:r>
+          </a:p>
+          <a:p>
+            <a:r>
+              <a:rPr lang="en-US" b="1" noProof="0" dirty="0"/>
+              <a:t>Medium-term:</a:t>
+            </a:r>
+          </a:p>
+          <a:p>
+            <a:pPr lvl="1"/>
+            <a:r>
+              <a:rPr lang="en-US" noProof="0" dirty="0"/>
+              <a:t>Deliberate Hardware stack</a:t>
+            </a:r>
+          </a:p>
+          <a:p>
+            <a:r>
+              <a:rPr lang="en-US" b="1" noProof="0" dirty="0"/>
+              <a:t>Long-term:</a:t>
+            </a:r>
+          </a:p>
+          <a:p>
+            <a:pPr lvl="1"/>
+            <a:r>
+              <a:rPr lang="en-US" noProof="0" dirty="0"/>
+              <a:t>???</a:t>
             </a:r>
           </a:p>
         </p:txBody>
@@ -5073,6 +5024,166 @@
   <p:cSld>
     <p:spTree>
       <p:nvGrpSpPr>
+        <p:cNvPr id="1" name="">
+          <a:extLst>
+            <a:ext uri="{FF2B5EF4-FFF2-40B4-BE49-F238E27FC236}">
+              <a16:creationId xmlns:a16="http://schemas.microsoft.com/office/drawing/2014/main" id="{637A5887-9D63-5131-FE54-026D71816223}"/>
+            </a:ext>
+          </a:extLst>
+        </p:cNvPr>
+        <p:cNvGrpSpPr/>
+        <p:nvPr/>
+      </p:nvGrpSpPr>
+      <p:grpSpPr>
+        <a:xfrm>
+          <a:off x="0" y="0"/>
+          <a:ext cx="0" cy="0"/>
+          <a:chOff x="0" y="0"/>
+          <a:chExt cx="0" cy="0"/>
+        </a:xfrm>
+      </p:grpSpPr>
+      <p:sp>
+        <p:nvSpPr>
+          <p:cNvPr id="2" name="Title 1">
+            <a:extLst>
+              <a:ext uri="{FF2B5EF4-FFF2-40B4-BE49-F238E27FC236}">
+                <a16:creationId xmlns:a16="http://schemas.microsoft.com/office/drawing/2014/main" id="{98E71E36-8C4D-F4AA-472D-974B335C7953}"/>
+              </a:ext>
+            </a:extLst>
+          </p:cNvPr>
+          <p:cNvSpPr>
+            <a:spLocks noGrp="1"/>
+          </p:cNvSpPr>
+          <p:nvPr>
+            <p:ph type="title"/>
+          </p:nvPr>
+        </p:nvSpPr>
+        <p:spPr/>
+        <p:txBody>
+          <a:bodyPr/>
+          <a:lstStyle/>
+          <a:p>
+            <a:pPr marL="0" lvl="0" indent="0">
+              <a:buNone/>
+            </a:pPr>
+            <a:r>
+              <a:rPr lang="en-US" noProof="0" dirty="0"/>
+              <a:t>What Actually Ships vs Source Code</a:t>
+            </a:r>
+          </a:p>
+        </p:txBody>
+      </p:sp>
+      <p:sp>
+        <p:nvSpPr>
+          <p:cNvPr id="3" name="Content Placeholder 2">
+            <a:extLst>
+              <a:ext uri="{FF2B5EF4-FFF2-40B4-BE49-F238E27FC236}">
+                <a16:creationId xmlns:a16="http://schemas.microsoft.com/office/drawing/2014/main" id="{FB17D71A-4AD9-ECD0-6F9B-A3D6C02B6B42}"/>
+              </a:ext>
+            </a:extLst>
+          </p:cNvPr>
+          <p:cNvSpPr>
+            <a:spLocks noGrp="1"/>
+          </p:cNvSpPr>
+          <p:nvPr>
+            <p:ph idx="1"/>
+          </p:nvPr>
+        </p:nvSpPr>
+        <p:spPr/>
+        <p:txBody>
+          <a:bodyPr>
+            <a:normAutofit fontScale="55000" lnSpcReduction="20000"/>
+          </a:bodyPr>
+          <a:lstStyle/>
+          <a:p>
+            <a:pPr marL="0" lvl="0" indent="0">
+              <a:spcBef>
+                <a:spcPts val="3000"/>
+              </a:spcBef>
+              <a:buNone/>
+            </a:pPr>
+            <a:r>
+              <a:rPr lang="en-US" b="1" noProof="0" dirty="0"/>
+              <a:t>Our minimal implementation</a:t>
+            </a:r>
+          </a:p>
+          <a:p>
+            <a:pPr indent="0">
+              <a:buNone/>
+            </a:pPr>
+            <a:r>
+              <a:rPr lang="en-US" noProof="0" dirty="0">
+                <a:latin typeface="Courier"/>
+              </a:rPr>
+              <a:t>┌─────────────────────────────────┐
+│    Inference (llama2.c)         │     This is just 4,000 LOC
+├─────────────────────────────────┤
+│    Init System (custom)         │       
+├─────────────────────────────────┤
+│    Userspace (BusyBox)          │   
+├─────────────────────────────────┤ 
+│    libc (musl)                  │   Source Repository Total: 27M LOC				</a:t>
+            </a:r>
+          </a:p>
+          <a:p>
+            <a:pPr indent="0">
+              <a:buNone/>
+            </a:pPr>
+            <a:r>
+              <a:rPr lang="en-US" dirty="0">
+                <a:latin typeface="Courier"/>
+              </a:rPr>
+              <a:t>											</a:t>
+            </a:r>
+            <a:r>
+              <a:rPr lang="en-US" noProof="0" dirty="0">
+                <a:latin typeface="Courier"/>
+              </a:rPr>
+              <a:t>Compiled/Used Code: 1.1M LOC</a:t>
+            </a:r>
+          </a:p>
+          <a:p>
+            <a:pPr indent="0">
+              <a:buNone/>
+            </a:pPr>
+            <a:r>
+              <a:rPr lang="en-US" dirty="0">
+                <a:latin typeface="Courier"/>
+              </a:rPr>
+              <a:t>											</a:t>
+            </a:r>
+            <a:r>
+              <a:rPr lang="en-US" noProof="0" dirty="0">
+                <a:latin typeface="Courier"/>
+              </a:rPr>
+              <a:t>Efficiency: 96% code eliminated
+├─────────────────────────────────┤
+│    Linux Kernel (minimal)       │ 
+├─────────────────────────────────┤
+│    Bootloader (Limine)          │    
+└─────────────────────────────────┘</a:t>
+            </a:r>
+          </a:p>
+        </p:txBody>
+      </p:sp>
+    </p:spTree>
+    <p:extLst>
+      <p:ext uri="{BB962C8B-B14F-4D97-AF65-F5344CB8AC3E}">
+        <p14:creationId xmlns:p14="http://schemas.microsoft.com/office/powerpoint/2010/main" val="3536395329"/>
+      </p:ext>
+    </p:extLst>
+  </p:cSld>
+  <p:clrMapOvr>
+    <a:masterClrMapping/>
+  </p:clrMapOvr>
+</p:sld>
+</file>
+
+<file path=ppt/slides/slide7.xml><?xml version="1.0" encoding="utf-8"?>
+<p:sld xmlns:a="http://schemas.openxmlformats.org/drawingml/2006/main" xmlns:r="http://schemas.openxmlformats.org/officeDocument/2006/relationships" xmlns:p="http://schemas.openxmlformats.org/presentationml/2006/main">
+  <p:cSld>
+    <p:spTree>
+      <p:nvGrpSpPr>
         <p:cNvPr id="1" name=""/>
         <p:cNvGrpSpPr/>
         <p:nvPr/>
@@ -5165,7 +5276,7 @@
 </p:sld>
 </file>
 
-<file path=ppt/slides/slide7.xml><?xml version="1.0" encoding="utf-8"?>
+<file path=ppt/slides/slide8.xml><?xml version="1.0" encoding="utf-8"?>
 <p:sld xmlns:a="http://schemas.openxmlformats.org/drawingml/2006/main" xmlns:r="http://schemas.openxmlformats.org/officeDocument/2006/relationships" xmlns:p="http://schemas.openxmlformats.org/presentationml/2006/main">
   <p:cSld>
     <p:spTree>
@@ -5252,7 +5363,7 @@
 </p:sld>
 </file>
 
-<file path=ppt/slides/slide8.xml><?xml version="1.0" encoding="utf-8"?>
+<file path=ppt/slides/slide9.xml><?xml version="1.0" encoding="utf-8"?>
 <p:sld xmlns:a="http://schemas.openxmlformats.org/drawingml/2006/main" xmlns:r="http://schemas.openxmlformats.org/officeDocument/2006/relationships" xmlns:p="http://schemas.openxmlformats.org/presentationml/2006/main">
   <p:cSld>
     <p:spTree>
@@ -5322,109 +5433,6 @@
         <p14:creationId xmlns:p14="http://schemas.microsoft.com/office/powerpoint/2010/main" val="1584281072"/>
       </p:ext>
     </p:extLst>
-  </p:cSld>
-  <p:clrMapOvr>
-    <a:masterClrMapping/>
-  </p:clrMapOvr>
-</p:sld>
-</file>
-
-<file path=ppt/slides/slide9.xml><?xml version="1.0" encoding="utf-8"?>
-<p:sld xmlns:a="http://schemas.openxmlformats.org/drawingml/2006/main" xmlns:r="http://schemas.openxmlformats.org/officeDocument/2006/relationships" xmlns:p="http://schemas.openxmlformats.org/presentationml/2006/main">
-  <p:cSld>
-    <p:spTree>
-      <p:nvGrpSpPr>
-        <p:cNvPr id="1" name=""/>
-        <p:cNvGrpSpPr/>
-        <p:nvPr/>
-      </p:nvGrpSpPr>
-      <p:grpSpPr>
-        <a:xfrm>
-          <a:off x="0" y="0"/>
-          <a:ext cx="0" cy="0"/>
-          <a:chOff x="0" y="0"/>
-          <a:chExt cx="0" cy="0"/>
-        </a:xfrm>
-      </p:grpSpPr>
-      <p:sp>
-        <p:nvSpPr>
-          <p:cNvPr id="2" name="Title 1">
-            <a:extLst>
-              <a:ext uri="{FF2B5EF4-FFF2-40B4-BE49-F238E27FC236}">
-                <a16:creationId xmlns:a16="http://schemas.microsoft.com/office/drawing/2014/main" id="{1FD91782-A608-FA06-62AB-812DFB0A6F3E}"/>
-              </a:ext>
-            </a:extLst>
-          </p:cNvPr>
-          <p:cNvSpPr>
-            <a:spLocks noGrp="1"/>
-          </p:cNvSpPr>
-          <p:nvPr>
-            <p:ph type="title"/>
-          </p:nvPr>
-        </p:nvSpPr>
-        <p:spPr>
-          <a:xfrm>
-            <a:off x="457200" y="205979"/>
-            <a:ext cx="8229600" cy="857250"/>
-          </a:xfrm>
-        </p:spPr>
-        <p:txBody>
-          <a:bodyPr/>
-          <a:lstStyle/>
-          <a:p>
-            <a:r>
-              <a:rPr lang="en-US" noProof="0" dirty="0"/>
-              <a:t>Why Limine?</a:t>
-            </a:r>
-          </a:p>
-        </p:txBody>
-      </p:sp>
-      <p:sp>
-        <p:nvSpPr>
-          <p:cNvPr id="3" name="Content Placeholder 2"/>
-          <p:cNvSpPr>
-            <a:spLocks noGrp="1"/>
-          </p:cNvSpPr>
-          <p:nvPr>
-            <p:ph idx="1"/>
-          </p:nvPr>
-        </p:nvSpPr>
-        <p:spPr>
-          <a:xfrm>
-            <a:off x="457200" y="1200151"/>
-            <a:ext cx="8229600" cy="3394472"/>
-          </a:xfrm>
-        </p:spPr>
-        <p:txBody>
-          <a:bodyPr/>
-          <a:lstStyle/>
-          <a:p>
-            <a:r>
-              <a:rPr lang="en-US" noProof="0" dirty="0"/>
-              <a:t>Modern UEFI/BIOS support </a:t>
-            </a:r>
-          </a:p>
-          <a:p>
-            <a:r>
-              <a:rPr lang="en-US" noProof="0" dirty="0"/>
-              <a:t>Minimal configuration </a:t>
-            </a:r>
-          </a:p>
-          <a:p>
-            <a:r>
-              <a:rPr lang="en-US" noProof="0" dirty="0"/>
-              <a:t>Fast boot times </a:t>
-            </a:r>
-          </a:p>
-          <a:p>
-            <a:r>
-              <a:rPr lang="en-US" noProof="0" dirty="0"/>
-              <a:t>No unnecessary features</a:t>
-            </a:r>
-          </a:p>
-        </p:txBody>
-      </p:sp>
-    </p:spTree>
   </p:cSld>
   <p:clrMapOvr>
     <a:masterClrMapping/>
